--- a/assets/pptx/catalog-523.pptx
+++ b/assets/pptx/catalog-523.pptx
@@ -3258,7 +3258,7 @@
                 <a:ea typeface="Ebrima"/>
                 <a:cs typeface="Ebrima"/>
               </a:rPr>
-              <a:t>(4x)</a:t>
+              <a:t>4x</a:t>
             </a:r>
           </a:p>
         </p:txBody>
@@ -3325,7 +3325,7 @@
                 <a:ea typeface="Ebrima"/>
                 <a:cs typeface="Ebrima"/>
               </a:rPr>
-              <a:t>አይዞሽ በርቺ ግድ የለም (2x) ሁሉም ያልፋል እንደማያልፍ የለም ጨለማው ሲያልፍ ሌሊቱ ሲነጋ ሁሉም አለው ከእግዚአብሔር ዘንድ ዋጋ</a:t>
+              <a:t>አይዞሽ በርቺ ግድ የለም 2x ሁሉም ያልፋል እንደማያልፍ የለም ጨለማው ሲያልፍ ሌሊቱ ሲነጋ ሁሉም አለው ከእግዚአብሔር ዘንድ ዋጋ</a:t>
             </a:r>
           </a:p>
         </p:txBody>
@@ -3526,7 +3526,7 @@
                 <a:ea typeface="Ebrima"/>
                 <a:cs typeface="Ebrima"/>
               </a:rPr>
-              <a:t>(2x)</a:t>
+              <a:t>2x</a:t>
             </a:r>
           </a:p>
         </p:txBody>
@@ -3861,7 +3861,7 @@
                 <a:ea typeface="Ebrima"/>
                 <a:cs typeface="Ebrima"/>
               </a:rPr>
-              <a:t>(4x)</a:t>
+              <a:t>4x</a:t>
             </a:r>
           </a:p>
         </p:txBody>
@@ -3928,7 +3928,7 @@
                 <a:ea typeface="Ebrima"/>
                 <a:cs typeface="Ebrima"/>
               </a:rPr>
-              <a:t>አይዞሽ በርቺ ግድ የለም (2x) ሁሉም ያልፋል እንደማያልፍ የለም ጨለማው ሲያልፍ ሌሊቱ ሲነጋ ሁሉም አለው ከእግዚአብሔር ዘንድ ዋጋ</a:t>
+              <a:t>አይዞሽ በርቺ ግድ የለም 2x ሁሉም ያልፋል እንደማያልፍ የለም ጨለማው ሲያልፍ ሌሊቱ ሲነጋ ሁሉም አለው ከእግዚአብሔር ዘንድ ዋጋ</a:t>
             </a:r>
           </a:p>
         </p:txBody>
@@ -4129,7 +4129,7 @@
                 <a:ea typeface="Ebrima"/>
                 <a:cs typeface="Ebrima"/>
               </a:rPr>
-              <a:t>(2x)</a:t>
+              <a:t>2x</a:t>
             </a:r>
           </a:p>
         </p:txBody>
